--- a/microrefugia_review.pptx
+++ b/microrefugia_review.pptx
@@ -34,6 +34,10 @@
     <p:sldId id="282" r:id="rId28"/>
     <p:sldId id="283" r:id="rId29"/>
     <p:sldId id="284" r:id="rId30"/>
+    <p:sldId id="285" r:id="rId31"/>
+    <p:sldId id="286" r:id="rId32"/>
+    <p:sldId id="287" r:id="rId33"/>
+    <p:sldId id="288" r:id="rId34"/>
   </p:sldIdLst>
   <p:sldSz cx="9144000" cy="5143500" type="screen16x9"/>
   <p:notesSz cx="6858000" cy="9144000"/>
@@ -3218,14 +3222,14 @@
             </a:pPr>
             <a:r>
               <a:rPr/>
-              <a:t>reference for definition</a:t>
+              <a:t>framework</a:t>
             </a:r>
           </a:p>
         </p:txBody>
       </p:sp>
       <p:pic>
         <p:nvPicPr>
-          <p:cNvPr descr="microrefugia_review_files/figure-pptx/unnamed-chunk-10-1.png" id="0" name="Picture 1"/>
+          <p:cNvPr descr="microrefugia_review_files/figure-pptx/unnamed-chunk-9-1.png" id="0" name="Picture 1"/>
           <p:cNvPicPr>
             <a:picLocks noGrp="1" noChangeAspect="1"/>
           </p:cNvPicPr>
@@ -3295,41 +3299,90 @@
             </a:pPr>
             <a:r>
               <a:rPr/>
-              <a:t>position in relation to main range</a:t>
-            </a:r>
-          </a:p>
-        </p:txBody>
-      </p:sp>
-      <p:pic>
-        <p:nvPicPr>
-          <p:cNvPr descr="microrefugia_review_files/figure-pptx/unnamed-chunk-11-1.png" id="0" name="Picture 1"/>
-          <p:cNvPicPr>
-            <a:picLocks noGrp="1" noChangeAspect="1"/>
-          </p:cNvPicPr>
-          <p:nvPr/>
-        </p:nvPicPr>
-        <p:blipFill>
-          <a:blip r:embed="rId2"/>
-          <a:stretch>
-            <a:fillRect/>
-          </a:stretch>
-        </p:blipFill>
-        <p:spPr bwMode="auto">
-          <a:xfrm>
-            <a:off x="1181100" y="1193800"/>
-            <a:ext cx="6781800" cy="3390900"/>
-          </a:xfrm>
-          <a:prstGeom prst="rect">
-            <a:avLst/>
-          </a:prstGeom>
-          <a:noFill/>
-          <a:ln w="9525">
-            <a:noFill/>
-            <a:headEnd/>
-            <a:tailEnd/>
-          </a:ln>
-        </p:spPr>
-      </p:pic>
+              <a:t>Outline</a:t>
+            </a:r>
+          </a:p>
+        </p:txBody>
+      </p:sp>
+      <p:sp>
+        <p:nvSpPr>
+          <p:cNvPr id="3" name="Content Placeholder 2"/>
+          <p:cNvSpPr>
+            <a:spLocks noGrp="1"/>
+          </p:cNvSpPr>
+          <p:nvPr>
+            <p:ph idx="1"/>
+          </p:nvPr>
+        </p:nvSpPr>
+        <p:spPr/>
+        <p:txBody>
+          <a:bodyPr/>
+          <a:lstStyle/>
+          <a:p>
+            <a:pPr lvl="0" indent="-342900" marL="342900">
+              <a:buAutoNum type="arabicPeriod"/>
+            </a:pPr>
+            <a:r>
+              <a:rPr/>
+              <a:t>General context</a:t>
+            </a:r>
+          </a:p>
+          <a:p>
+            <a:pPr lvl="0" indent="-342900" marL="342900">
+              <a:buAutoNum type="arabicPeriod"/>
+            </a:pPr>
+            <a:r>
+              <a:rPr b="1"/>
+              <a:t>Definition</a:t>
+            </a:r>
+          </a:p>
+          <a:p>
+            <a:pPr lvl="1" indent="-342900" marL="685800">
+              <a:buAutoNum type="alphaLcPeriod"/>
+            </a:pPr>
+            <a:r>
+              <a:rPr/>
+              <a:t>How are microrefugia defined: Temporally</a:t>
+            </a:r>
+          </a:p>
+          <a:p>
+            <a:pPr lvl="2" indent="-342900" marL="1028700">
+              <a:buAutoNum type="romanUcPeriod"/>
+            </a:pPr>
+            <a:r>
+              <a:rPr/>
+              <a:t>Short-term vs millennial stability vs not at all defined?</a:t>
+            </a:r>
+          </a:p>
+          <a:p>
+            <a:pPr lvl="1" indent="-342900" marL="685800">
+              <a:buAutoNum type="alphaLcPeriod"/>
+            </a:pPr>
+            <a:r>
+              <a:rPr/>
+              <a:t>How are microrefugia defined: Spatially</a:t>
+            </a:r>
+          </a:p>
+          <a:p>
+            <a:pPr lvl="2" indent="-342900" marL="1028700">
+              <a:buAutoNum type="romanUcPeriod"/>
+            </a:pPr>
+            <a:r>
+              <a:rPr/>
+              <a:t>Size or structure defined?</a:t>
+            </a:r>
+          </a:p>
+          <a:p>
+            <a:pPr lvl="2" indent="-342900" marL="1028700">
+              <a:buAutoNum type="romanUcPeriod"/>
+            </a:pPr>
+            <a:r>
+              <a:rPr/>
+              <a:t>Minimum size for viable populations Microrefugia networks - metapopulation dynamics</a:t>
+            </a:r>
+          </a:p>
+        </p:txBody>
+      </p:sp>
     </p:spTree>
   </p:cSld>
 </p:sld>
@@ -3372,14 +3425,14 @@
             </a:pPr>
             <a:r>
               <a:rPr/>
-              <a:t>sampling structure</a:t>
+              <a:t>refugia term</a:t>
             </a:r>
           </a:p>
         </p:txBody>
       </p:sp>
       <p:pic>
         <p:nvPicPr>
-          <p:cNvPr descr="microrefugia_review_files/figure-pptx/unnamed-chunk-12-1.png" id="0" name="Picture 1"/>
+          <p:cNvPr descr="microrefugia_review_files/figure-pptx/unnamed-chunk-10-1.png" id="0" name="Picture 1"/>
           <p:cNvPicPr>
             <a:picLocks noGrp="1" noChangeAspect="1"/>
           </p:cNvPicPr>
@@ -3449,14 +3502,14 @@
             </a:pPr>
             <a:r>
               <a:rPr/>
-              <a:t>climate driver</a:t>
+              <a:t>reference for definition</a:t>
             </a:r>
           </a:p>
         </p:txBody>
       </p:sp>
       <p:pic>
         <p:nvPicPr>
-          <p:cNvPr descr="microrefugia_review_files/figure-pptx/unnamed-chunk-13-1.png" id="0" name="Picture 1"/>
+          <p:cNvPr descr="microrefugia_review_files/figure-pptx/unnamed-chunk-11-1.png" id="0" name="Picture 1"/>
           <p:cNvPicPr>
             <a:picLocks noGrp="1" noChangeAspect="1"/>
           </p:cNvPicPr>
@@ -3526,14 +3579,14 @@
             </a:pPr>
             <a:r>
               <a:rPr/>
-              <a:t>exposure_considered</a:t>
+              <a:t>position in relation to main range</a:t>
             </a:r>
           </a:p>
         </p:txBody>
       </p:sp>
       <p:pic>
         <p:nvPicPr>
-          <p:cNvPr descr="microrefugia_review_files/figure-pptx/unnamed-chunk-14-1.png" id="0" name="Picture 1"/>
+          <p:cNvPr descr="microrefugia_review_files/figure-pptx/unnamed-chunk-12-1.png" id="0" name="Picture 1"/>
           <p:cNvPicPr>
             <a:picLocks noGrp="1" noChangeAspect="1"/>
           </p:cNvPicPr>
@@ -3593,12 +3646,7 @@
             <p:ph type="title"/>
           </p:nvPr>
         </p:nvSpPr>
-        <p:spPr>
-          <a:xfrm>
-            <a:off x="457201" y="204787"/>
-            <a:ext cx="3008313" cy="871538"/>
-          </a:xfrm>
-        </p:spPr>
+        <p:spPr/>
         <p:txBody>
           <a:bodyPr/>
           <a:lstStyle/>
@@ -3608,39 +3656,14 @@
             </a:pPr>
             <a:r>
               <a:rPr/>
-              <a:t>species_sensitivity</a:t>
-            </a:r>
-          </a:p>
-        </p:txBody>
-      </p:sp>
-      <p:sp>
-        <p:nvSpPr>
-          <p:cNvPr id="4" name="Text Placeholder 3"/>
-          <p:cNvSpPr>
-            <a:spLocks noGrp="1"/>
-          </p:cNvSpPr>
-          <p:nvPr>
-            <p:ph idx="2" sz="half" type="body"/>
-          </p:nvPr>
-        </p:nvSpPr>
-        <p:spPr/>
-        <p:txBody>
-          <a:bodyPr/>
-          <a:lstStyle/>
-          <a:p>
-            <a:pPr lvl="0" indent="0" marL="0">
-              <a:buNone/>
-            </a:pPr>
-            <a:r>
-              <a:rPr/>
-              <a:t>ie_what_is_the_vulnerable_part_of_the_species</a:t>
+              <a:t>sampling structure</a:t>
             </a:r>
           </a:p>
         </p:txBody>
       </p:sp>
       <p:pic>
         <p:nvPicPr>
-          <p:cNvPr descr="microrefugia_review_files/figure-pptx/unnamed-chunk-15-1.png" id="0" name="Picture 1"/>
+          <p:cNvPr descr="microrefugia_review_files/figure-pptx/unnamed-chunk-13-1.png" id="0" name="Picture 1"/>
           <p:cNvPicPr>
             <a:picLocks noGrp="1" noChangeAspect="1"/>
           </p:cNvPicPr>
@@ -3654,8 +3677,8 @@
         </p:blipFill>
         <p:spPr bwMode="auto">
           <a:xfrm>
-            <a:off x="3568700" y="1117600"/>
-            <a:ext cx="5105400" cy="2552700"/>
+            <a:off x="1181100" y="1193800"/>
+            <a:ext cx="6781800" cy="3390900"/>
           </a:xfrm>
           <a:prstGeom prst="rect">
             <a:avLst/>
@@ -3710,41 +3733,81 @@
             </a:pPr>
             <a:r>
               <a:rPr/>
-              <a:t>Species sensitivity used to ID refugia</a:t>
-            </a:r>
-          </a:p>
-        </p:txBody>
-      </p:sp>
-      <p:pic>
-        <p:nvPicPr>
-          <p:cNvPr descr="microrefugia_review_files/figure-pptx/unnamed-chunk-16-1.png" id="0" name="Picture 1"/>
-          <p:cNvPicPr>
-            <a:picLocks noGrp="1" noChangeAspect="1"/>
-          </p:cNvPicPr>
-          <p:nvPr/>
-        </p:nvPicPr>
-        <p:blipFill>
-          <a:blip r:embed="rId2"/>
-          <a:stretch>
-            <a:fillRect/>
-          </a:stretch>
-        </p:blipFill>
-        <p:spPr bwMode="auto">
-          <a:xfrm>
-            <a:off x="1181100" y="1193800"/>
-            <a:ext cx="6781800" cy="3390900"/>
-          </a:xfrm>
-          <a:prstGeom prst="rect">
-            <a:avLst/>
-          </a:prstGeom>
-          <a:noFill/>
-          <a:ln w="9525">
-            <a:noFill/>
-            <a:headEnd/>
-            <a:tailEnd/>
-          </a:ln>
-        </p:spPr>
-      </p:pic>
+              <a:t>Outline</a:t>
+            </a:r>
+          </a:p>
+        </p:txBody>
+      </p:sp>
+      <p:sp>
+        <p:nvSpPr>
+          <p:cNvPr id="3" name="Content Placeholder 2"/>
+          <p:cNvSpPr>
+            <a:spLocks noGrp="1"/>
+          </p:cNvSpPr>
+          <p:nvPr>
+            <p:ph idx="1"/>
+          </p:nvPr>
+        </p:nvSpPr>
+        <p:spPr/>
+        <p:txBody>
+          <a:bodyPr/>
+          <a:lstStyle/>
+          <a:p>
+            <a:pPr lvl="0" indent="-342900" marL="342900">
+              <a:buAutoNum type="arabicPeriod"/>
+            </a:pPr>
+            <a:r>
+              <a:rPr/>
+              <a:t>General context</a:t>
+            </a:r>
+          </a:p>
+          <a:p>
+            <a:pPr lvl="0" indent="-342900" marL="342900">
+              <a:buAutoNum type="arabicPeriod"/>
+            </a:pPr>
+            <a:r>
+              <a:rPr/>
+              <a:t>Definition</a:t>
+            </a:r>
+          </a:p>
+          <a:p>
+            <a:pPr lvl="0" indent="-342900" marL="342900">
+              <a:buAutoNum type="arabicPeriod"/>
+            </a:pPr>
+            <a:r>
+              <a:rPr b="1"/>
+              <a:t>Aspects of vulnerability</a:t>
+            </a:r>
+          </a:p>
+          <a:p>
+            <a:pPr lvl="1" indent="-342900" marL="685800">
+              <a:buAutoNum type="alphaLcPeriod"/>
+            </a:pPr>
+            <a:r>
+              <a:rPr/>
+              <a:t>Exposure</a:t>
+            </a:r>
+          </a:p>
+          <a:p>
+            <a:pPr lvl="1" indent="-342900" marL="685800">
+              <a:buAutoNum type="alphaLcPeriod"/>
+            </a:pPr>
+            <a:r>
+              <a:rPr/>
+              <a:t>Sensitivity</a:t>
+            </a:r>
+          </a:p>
+          <a:p>
+            <a:pPr lvl="1" indent="-342900" marL="685800">
+              <a:buAutoNum type="alphaLcPeriod"/>
+            </a:pPr>
+            <a:r>
+              <a:rPr/>
+              <a:t>Adaptive capacity</a:t>
+            </a:r>
+          </a:p>
+        </p:txBody>
+      </p:sp>
     </p:spTree>
   </p:cSld>
 </p:sld>
@@ -3787,14 +3850,14 @@
             </a:pPr>
             <a:r>
               <a:rPr/>
-              <a:t>Species adaptablity</a:t>
+              <a:t>climate driver</a:t>
             </a:r>
           </a:p>
         </p:txBody>
       </p:sp>
       <p:pic>
         <p:nvPicPr>
-          <p:cNvPr descr="microrefugia_review_files/figure-pptx/unnamed-chunk-17-1.png" id="0" name="Picture 1"/>
+          <p:cNvPr descr="microrefugia_review_files/figure-pptx/unnamed-chunk-14-1.png" id="0" name="Picture 1"/>
           <p:cNvPicPr>
             <a:picLocks noGrp="1" noChangeAspect="1"/>
           </p:cNvPicPr>
@@ -3864,14 +3927,14 @@
             </a:pPr>
             <a:r>
               <a:rPr/>
-              <a:t>refugia_structure</a:t>
+              <a:t>exposure_considered</a:t>
             </a:r>
           </a:p>
         </p:txBody>
       </p:sp>
       <p:pic>
         <p:nvPicPr>
-          <p:cNvPr descr="microrefugia_review_files/figure-pptx/unnamed-chunk-18-1.png" id="0" name="Picture 1"/>
+          <p:cNvPr descr="microrefugia_review_files/figure-pptx/unnamed-chunk-15-1.png" id="0" name="Picture 1"/>
           <p:cNvPicPr>
             <a:picLocks noGrp="1" noChangeAspect="1"/>
           </p:cNvPicPr>
@@ -3931,7 +3994,12 @@
             <p:ph type="title"/>
           </p:nvPr>
         </p:nvSpPr>
-        <p:spPr/>
+        <p:spPr>
+          <a:xfrm>
+            <a:off x="457201" y="204787"/>
+            <a:ext cx="3008313" cy="871538"/>
+          </a:xfrm>
+        </p:spPr>
         <p:txBody>
           <a:bodyPr/>
           <a:lstStyle/>
@@ -3941,14 +4009,39 @@
             </a:pPr>
             <a:r>
               <a:rPr/>
-              <a:t>species response to changing climate</a:t>
+              <a:t>species_sensitivity</a:t>
+            </a:r>
+          </a:p>
+        </p:txBody>
+      </p:sp>
+      <p:sp>
+        <p:nvSpPr>
+          <p:cNvPr id="4" name="Text Placeholder 3"/>
+          <p:cNvSpPr>
+            <a:spLocks noGrp="1"/>
+          </p:cNvSpPr>
+          <p:nvPr>
+            <p:ph idx="2" sz="half" type="body"/>
+          </p:nvPr>
+        </p:nvSpPr>
+        <p:spPr/>
+        <p:txBody>
+          <a:bodyPr/>
+          <a:lstStyle/>
+          <a:p>
+            <a:pPr lvl="0" indent="0" marL="0">
+              <a:buNone/>
+            </a:pPr>
+            <a:r>
+              <a:rPr/>
+              <a:t>ie_what_is_the_vulnerable_part_of_the_species</a:t>
             </a:r>
           </a:p>
         </p:txBody>
       </p:sp>
       <p:pic>
         <p:nvPicPr>
-          <p:cNvPr descr="microrefugia_review_files/figure-pptx/unnamed-chunk-19-1.png" id="0" name="Picture 1"/>
+          <p:cNvPr descr="microrefugia_review_files/figure-pptx/unnamed-chunk-16-1.png" id="0" name="Picture 1"/>
           <p:cNvPicPr>
             <a:picLocks noGrp="1" noChangeAspect="1"/>
           </p:cNvPicPr>
@@ -3962,8 +4055,8 @@
         </p:blipFill>
         <p:spPr bwMode="auto">
           <a:xfrm>
-            <a:off x="1181100" y="1193800"/>
-            <a:ext cx="6781800" cy="3390900"/>
+            <a:off x="3568700" y="1117600"/>
+            <a:ext cx="5105400" cy="2552700"/>
           </a:xfrm>
           <a:prstGeom prst="rect">
             <a:avLst/>
@@ -4018,41 +4111,90 @@
             </a:pPr>
             <a:r>
               <a:rPr/>
-              <a:t>screening</a:t>
-            </a:r>
-          </a:p>
-        </p:txBody>
-      </p:sp>
-      <p:pic>
-        <p:nvPicPr>
-          <p:cNvPr descr="microrefugia_review_files/figure-pptx/unnamed-chunk-2-1.png" id="0" name="Picture 1"/>
-          <p:cNvPicPr>
-            <a:picLocks noGrp="1" noChangeAspect="1"/>
-          </p:cNvPicPr>
-          <p:nvPr/>
-        </p:nvPicPr>
-        <p:blipFill>
-          <a:blip r:embed="rId2"/>
-          <a:stretch>
-            <a:fillRect/>
-          </a:stretch>
-        </p:blipFill>
-        <p:spPr bwMode="auto">
-          <a:xfrm>
-            <a:off x="1181100" y="1193800"/>
-            <a:ext cx="6781800" cy="3390900"/>
-          </a:xfrm>
-          <a:prstGeom prst="rect">
-            <a:avLst/>
-          </a:prstGeom>
-          <a:noFill/>
-          <a:ln w="9525">
-            <a:noFill/>
-            <a:headEnd/>
-            <a:tailEnd/>
-          </a:ln>
-        </p:spPr>
-      </p:pic>
+              <a:t>Outline</a:t>
+            </a:r>
+          </a:p>
+        </p:txBody>
+      </p:sp>
+      <p:sp>
+        <p:nvSpPr>
+          <p:cNvPr id="3" name="Content Placeholder 2"/>
+          <p:cNvSpPr>
+            <a:spLocks noGrp="1"/>
+          </p:cNvSpPr>
+          <p:nvPr>
+            <p:ph idx="1"/>
+          </p:nvPr>
+        </p:nvSpPr>
+        <p:spPr/>
+        <p:txBody>
+          <a:bodyPr/>
+          <a:lstStyle/>
+          <a:p>
+            <a:pPr lvl="0" indent="-342900" marL="342900">
+              <a:buAutoNum type="arabicPeriod"/>
+            </a:pPr>
+            <a:r>
+              <a:rPr b="1"/>
+              <a:t>General context</a:t>
+            </a:r>
+          </a:p>
+          <a:p>
+            <a:pPr lvl="0" indent="-342900" marL="342900">
+              <a:buAutoNum type="arabicPeriod"/>
+            </a:pPr>
+            <a:r>
+              <a:rPr/>
+              <a:t>Definition</a:t>
+            </a:r>
+          </a:p>
+          <a:p>
+            <a:pPr lvl="0" indent="-342900" marL="342900">
+              <a:buAutoNum type="arabicPeriod"/>
+            </a:pPr>
+            <a:r>
+              <a:rPr/>
+              <a:t>Aspects of vulnerability</a:t>
+            </a:r>
+          </a:p>
+          <a:p>
+            <a:pPr lvl="1" indent="-342900" marL="685800">
+              <a:buAutoNum type="alphaLcPeriod"/>
+            </a:pPr>
+            <a:r>
+              <a:rPr/>
+              <a:t>Sensitivity</a:t>
+            </a:r>
+          </a:p>
+          <a:p>
+            <a:pPr lvl="1" indent="-342900" marL="685800">
+              <a:buAutoNum type="alphaLcPeriod"/>
+            </a:pPr>
+            <a:r>
+              <a:rPr/>
+              <a:t>Exposure</a:t>
+            </a:r>
+          </a:p>
+          <a:p>
+            <a:pPr lvl="1" indent="-342900" marL="685800">
+              <a:buAutoNum type="alphaLcPeriod"/>
+            </a:pPr>
+            <a:r>
+              <a:rPr/>
+              <a:t>Adaptive capacity</a:t>
+            </a:r>
+          </a:p>
+          <a:p>
+            <a:pPr lvl="0" indent="-342900" marL="342900">
+              <a:buAutoNum type="arabicPeriod"/>
+            </a:pPr>
+            <a:r>
+              <a:rPr/>
+              <a:t>How are microrefugia acutally quantified?</a:t>
+            </a:r>
+          </a:p>
+        </p:txBody>
+      </p:sp>
     </p:spTree>
   </p:cSld>
 </p:sld>
@@ -4095,14 +4237,14 @@
             </a:pPr>
             <a:r>
               <a:rPr/>
-              <a:t>plot size</a:t>
+              <a:t>Species sensitivity used to ID refugia</a:t>
             </a:r>
           </a:p>
         </p:txBody>
       </p:sp>
       <p:pic>
         <p:nvPicPr>
-          <p:cNvPr descr="microrefugia_review_files/figure-pptx/unnamed-chunk-20-1.png" id="0" name="Picture 1"/>
+          <p:cNvPr descr="microrefugia_review_files/figure-pptx/unnamed-chunk-17-1.png" id="0" name="Picture 1"/>
           <p:cNvPicPr>
             <a:picLocks noGrp="1" noChangeAspect="1"/>
           </p:cNvPicPr>
@@ -4172,14 +4314,14 @@
             </a:pPr>
             <a:r>
               <a:rPr/>
-              <a:t>spatial resolution</a:t>
+              <a:t>Species adaptablity</a:t>
             </a:r>
           </a:p>
         </p:txBody>
       </p:sp>
       <p:pic>
         <p:nvPicPr>
-          <p:cNvPr descr="microrefugia_review_files/figure-pptx/unnamed-chunk-21-1.png" id="0" name="Picture 1"/>
+          <p:cNvPr descr="microrefugia_review_files/figure-pptx/unnamed-chunk-18-1.png" id="0" name="Picture 1"/>
           <p:cNvPicPr>
             <a:picLocks noGrp="1" noChangeAspect="1"/>
           </p:cNvPicPr>
@@ -4249,14 +4391,14 @@
             </a:pPr>
             <a:r>
               <a:rPr/>
-              <a:t>spatial extent</a:t>
+              <a:t>refugia_structure</a:t>
             </a:r>
           </a:p>
         </p:txBody>
       </p:sp>
       <p:pic>
         <p:nvPicPr>
-          <p:cNvPr descr="microrefugia_review_files/figure-pptx/unnamed-chunk-22-1.png" id="0" name="Picture 1"/>
+          <p:cNvPr descr="microrefugia_review_files/figure-pptx/unnamed-chunk-19-1.png" id="0" name="Picture 1"/>
           <p:cNvPicPr>
             <a:picLocks noGrp="1" noChangeAspect="1"/>
           </p:cNvPicPr>
@@ -4326,14 +4468,14 @@
             </a:pPr>
             <a:r>
               <a:rPr/>
-              <a:t>temporal aspects</a:t>
+              <a:t>species response to changing climate</a:t>
             </a:r>
           </a:p>
         </p:txBody>
       </p:sp>
       <p:pic>
         <p:nvPicPr>
-          <p:cNvPr descr="microrefugia_review_files/figure-pptx/unnamed-chunk-23-1.png" id="0" name="Picture 1"/>
+          <p:cNvPr descr="microrefugia_review_files/figure-pptx/unnamed-chunk-20-1.png" id="0" name="Picture 1"/>
           <p:cNvPicPr>
             <a:picLocks noGrp="1" noChangeAspect="1"/>
           </p:cNvPicPr>
@@ -4403,14 +4545,14 @@
             </a:pPr>
             <a:r>
               <a:rPr/>
-              <a:t>climate variables</a:t>
+              <a:t>plot size</a:t>
             </a:r>
           </a:p>
         </p:txBody>
       </p:sp>
       <p:pic>
         <p:nvPicPr>
-          <p:cNvPr descr="microrefugia_review_files/figure-pptx/unnamed-chunk-24-1.png" id="0" name="Picture 1"/>
+          <p:cNvPr descr="microrefugia_review_files/figure-pptx/unnamed-chunk-21-1.png" id="0" name="Picture 1"/>
           <p:cNvPicPr>
             <a:picLocks noGrp="1" noChangeAspect="1"/>
           </p:cNvPicPr>
@@ -4460,9 +4602,34 @@
           <a:chExt cx="0" cy="0"/>
         </a:xfrm>
       </p:grpSpPr>
+      <p:sp>
+        <p:nvSpPr>
+          <p:cNvPr id="2" name="Title 1"/>
+          <p:cNvSpPr>
+            <a:spLocks noGrp="1"/>
+          </p:cNvSpPr>
+          <p:nvPr>
+            <p:ph type="title"/>
+          </p:nvPr>
+        </p:nvSpPr>
+        <p:spPr/>
+        <p:txBody>
+          <a:bodyPr/>
+          <a:lstStyle/>
+          <a:p>
+            <a:pPr lvl="0" indent="0" marL="0">
+              <a:buNone/>
+            </a:pPr>
+            <a:r>
+              <a:rPr/>
+              <a:t>spatial resolution</a:t>
+            </a:r>
+          </a:p>
+        </p:txBody>
+      </p:sp>
       <p:pic>
         <p:nvPicPr>
-          <p:cNvPr descr="microrefugia_review_files/figure-pptx/unnamed-chunk-25-1.png" id="0" name="Picture 1"/>
+          <p:cNvPr descr="microrefugia_review_files/figure-pptx/unnamed-chunk-22-1.png" id="0" name="Picture 1"/>
           <p:cNvPicPr>
             <a:picLocks noGrp="1" noChangeAspect="1"/>
           </p:cNvPicPr>
@@ -4512,9 +4679,34 @@
           <a:chExt cx="0" cy="0"/>
         </a:xfrm>
       </p:grpSpPr>
+      <p:sp>
+        <p:nvSpPr>
+          <p:cNvPr id="2" name="Title 1"/>
+          <p:cNvSpPr>
+            <a:spLocks noGrp="1"/>
+          </p:cNvSpPr>
+          <p:nvPr>
+            <p:ph type="title"/>
+          </p:nvPr>
+        </p:nvSpPr>
+        <p:spPr/>
+        <p:txBody>
+          <a:bodyPr/>
+          <a:lstStyle/>
+          <a:p>
+            <a:pPr lvl="0" indent="0" marL="0">
+              <a:buNone/>
+            </a:pPr>
+            <a:r>
+              <a:rPr/>
+              <a:t>spatial extent</a:t>
+            </a:r>
+          </a:p>
+        </p:txBody>
+      </p:sp>
       <p:pic>
         <p:nvPicPr>
-          <p:cNvPr descr="microrefugia_review_files/figure-pptx/unnamed-chunk-26-1.png" id="0" name="Picture 1"/>
+          <p:cNvPr descr="microrefugia_review_files/figure-pptx/unnamed-chunk-23-1.png" id="0" name="Picture 1"/>
           <p:cNvPicPr>
             <a:picLocks noGrp="1" noChangeAspect="1"/>
           </p:cNvPicPr>
@@ -4564,9 +4756,34 @@
           <a:chExt cx="0" cy="0"/>
         </a:xfrm>
       </p:grpSpPr>
+      <p:sp>
+        <p:nvSpPr>
+          <p:cNvPr id="2" name="Title 1"/>
+          <p:cNvSpPr>
+            <a:spLocks noGrp="1"/>
+          </p:cNvSpPr>
+          <p:nvPr>
+            <p:ph type="title"/>
+          </p:nvPr>
+        </p:nvSpPr>
+        <p:spPr/>
+        <p:txBody>
+          <a:bodyPr/>
+          <a:lstStyle/>
+          <a:p>
+            <a:pPr lvl="0" indent="0" marL="0">
+              <a:buNone/>
+            </a:pPr>
+            <a:r>
+              <a:rPr/>
+              <a:t>temporal aspects</a:t>
+            </a:r>
+          </a:p>
+        </p:txBody>
+      </p:sp>
       <p:pic>
         <p:nvPicPr>
-          <p:cNvPr descr="microrefugia_review_files/figure-pptx/unnamed-chunk-27-1.png" id="0" name="Picture 1"/>
+          <p:cNvPr descr="microrefugia_review_files/figure-pptx/unnamed-chunk-24-1.png" id="0" name="Picture 1"/>
           <p:cNvPicPr>
             <a:picLocks noGrp="1" noChangeAspect="1"/>
           </p:cNvPicPr>
@@ -4636,14 +4853,14 @@
             </a:pPr>
             <a:r>
               <a:rPr/>
-              <a:t>specific quantification</a:t>
+              <a:t>climate variables</a:t>
             </a:r>
           </a:p>
         </p:txBody>
       </p:sp>
       <p:pic>
         <p:nvPicPr>
-          <p:cNvPr descr="microrefugia_review_files/figure-pptx/unnamed-chunk-28-1.png" id="0" name="Picture 1"/>
+          <p:cNvPr descr="microrefugia_review_files/figure-pptx/unnamed-chunk-25-1.png" id="0" name="Picture 1"/>
           <p:cNvPicPr>
             <a:picLocks noGrp="1" noChangeAspect="1"/>
           </p:cNvPicPr>
@@ -4695,81 +4912,32 @@
       </p:grpSpPr>
       <p:sp>
         <p:nvSpPr>
-          <p:cNvPr id="3" name="Content Placeholder 2"/>
-          <p:cNvSpPr>
-            <a:spLocks noGrp="1"/>
-          </p:cNvSpPr>
-          <p:nvPr>
-            <p:ph idx="1"/>
-          </p:nvPr>
-        </p:nvSpPr>
-        <p:spPr/>
-        <p:txBody>
-          <a:bodyPr/>
-          <a:lstStyle/>
-          <a:p>
-            <a:pPr lvl="0" indent="0">
+          <p:cNvPr id="2" name="Title 1"/>
+          <p:cNvSpPr>
+            <a:spLocks noGrp="1"/>
+          </p:cNvSpPr>
+          <p:nvPr>
+            <p:ph type="title"/>
+          </p:nvPr>
+        </p:nvSpPr>
+        <p:spPr/>
+        <p:txBody>
+          <a:bodyPr/>
+          <a:lstStyle/>
+          <a:p>
+            <a:pPr lvl="0" indent="0" marL="0">
               <a:buNone/>
             </a:pPr>
             <a:r>
-              <a:rPr>
-                <a:latin typeface="Courier"/>
-              </a:rPr>
-              <a:t>[1] "119 descriptions entered"</a:t>
-            </a:r>
-          </a:p>
-        </p:txBody>
-      </p:sp>
-    </p:spTree>
-  </p:cSld>
-</p:sld>
-</file>
-
-<file path=ppt/slides/slide3.xml><?xml version="1.0" encoding="utf-8"?>
-<p:sld xmlns:a="http://schemas.openxmlformats.org/drawingml/2006/main" xmlns:r="http://schemas.openxmlformats.org/officeDocument/2006/relationships" xmlns:p="http://schemas.openxmlformats.org/presentationml/2006/main">
-  <p:cSld>
-    <p:spTree>
-      <p:nvGrpSpPr>
-        <p:cNvPr id="1" name=""/>
-        <p:cNvGrpSpPr/>
-        <p:nvPr/>
-      </p:nvGrpSpPr>
-      <p:grpSpPr>
-        <a:xfrm>
-          <a:off x="0" y="0"/>
-          <a:ext cx="0" cy="0"/>
-          <a:chOff x="0" y="0"/>
-          <a:chExt cx="0" cy="0"/>
-        </a:xfrm>
-      </p:grpSpPr>
-      <p:sp>
-        <p:nvSpPr>
-          <p:cNvPr id="2" name="Title 1"/>
-          <p:cNvSpPr>
-            <a:spLocks noGrp="1"/>
-          </p:cNvSpPr>
-          <p:nvPr>
-            <p:ph type="title"/>
-          </p:nvPr>
-        </p:nvSpPr>
-        <p:spPr/>
-        <p:txBody>
-          <a:bodyPr/>
-          <a:lstStyle/>
-          <a:p>
-            <a:pPr lvl="0" indent="0" marL="0">
-              <a:buNone/>
-            </a:pPr>
-            <a:r>
               <a:rPr/>
-              <a:t>reasons for exclusion</a:t>
+              <a:t>climate data source</a:t>
             </a:r>
           </a:p>
         </p:txBody>
       </p:sp>
       <p:pic>
         <p:nvPicPr>
-          <p:cNvPr descr="microrefugia_review_files/figure-pptx/unnamed-chunk-3-1.png" id="0" name="Picture 1"/>
+          <p:cNvPr descr="microrefugia_review_files/figure-pptx/unnamed-chunk-26-1.png" id="0" name="Picture 1"/>
           <p:cNvPicPr>
             <a:picLocks noGrp="1" noChangeAspect="1"/>
           </p:cNvPicPr>
@@ -4802,6 +4970,363 @@
 </p:sld>
 </file>
 
+<file path=ppt/slides/slide3.xml><?xml version="1.0" encoding="utf-8"?>
+<p:sld xmlns:a="http://schemas.openxmlformats.org/drawingml/2006/main" xmlns:r="http://schemas.openxmlformats.org/officeDocument/2006/relationships" xmlns:p="http://schemas.openxmlformats.org/presentationml/2006/main">
+  <p:cSld>
+    <p:spTree>
+      <p:nvGrpSpPr>
+        <p:cNvPr id="1" name=""/>
+        <p:cNvGrpSpPr/>
+        <p:nvPr/>
+      </p:nvGrpSpPr>
+      <p:grpSpPr>
+        <a:xfrm>
+          <a:off x="0" y="0"/>
+          <a:ext cx="0" cy="0"/>
+          <a:chOff x="0" y="0"/>
+          <a:chExt cx="0" cy="0"/>
+        </a:xfrm>
+      </p:grpSpPr>
+      <p:sp>
+        <p:nvSpPr>
+          <p:cNvPr id="2" name="Title 1"/>
+          <p:cNvSpPr>
+            <a:spLocks noGrp="1"/>
+          </p:cNvSpPr>
+          <p:nvPr>
+            <p:ph type="title"/>
+          </p:nvPr>
+        </p:nvSpPr>
+        <p:spPr/>
+        <p:txBody>
+          <a:bodyPr/>
+          <a:lstStyle/>
+          <a:p>
+            <a:pPr lvl="0" indent="0" marL="0">
+              <a:buNone/>
+            </a:pPr>
+            <a:r>
+              <a:rPr/>
+              <a:t>screening</a:t>
+            </a:r>
+          </a:p>
+        </p:txBody>
+      </p:sp>
+      <p:pic>
+        <p:nvPicPr>
+          <p:cNvPr descr="microrefugia_review_files/figure-pptx/unnamed-chunk-2-1.png" id="0" name="Picture 1"/>
+          <p:cNvPicPr>
+            <a:picLocks noGrp="1" noChangeAspect="1"/>
+          </p:cNvPicPr>
+          <p:nvPr/>
+        </p:nvPicPr>
+        <p:blipFill>
+          <a:blip r:embed="rId2"/>
+          <a:stretch>
+            <a:fillRect/>
+          </a:stretch>
+        </p:blipFill>
+        <p:spPr bwMode="auto">
+          <a:xfrm>
+            <a:off x="1181100" y="1193800"/>
+            <a:ext cx="6781800" cy="3390900"/>
+          </a:xfrm>
+          <a:prstGeom prst="rect">
+            <a:avLst/>
+          </a:prstGeom>
+          <a:noFill/>
+          <a:ln w="9525">
+            <a:noFill/>
+            <a:headEnd/>
+            <a:tailEnd/>
+          </a:ln>
+        </p:spPr>
+      </p:pic>
+    </p:spTree>
+  </p:cSld>
+</p:sld>
+</file>
+
+<file path=ppt/slides/slide30.xml><?xml version="1.0" encoding="utf-8"?>
+<p:sld xmlns:a="http://schemas.openxmlformats.org/drawingml/2006/main" xmlns:r="http://schemas.openxmlformats.org/officeDocument/2006/relationships" xmlns:p="http://schemas.openxmlformats.org/presentationml/2006/main">
+  <p:cSld>
+    <p:spTree>
+      <p:nvGrpSpPr>
+        <p:cNvPr id="1" name=""/>
+        <p:cNvGrpSpPr/>
+        <p:nvPr/>
+      </p:nvGrpSpPr>
+      <p:grpSpPr>
+        <a:xfrm>
+          <a:off x="0" y="0"/>
+          <a:ext cx="0" cy="0"/>
+          <a:chOff x="0" y="0"/>
+          <a:chExt cx="0" cy="0"/>
+        </a:xfrm>
+      </p:grpSpPr>
+      <p:sp>
+        <p:nvSpPr>
+          <p:cNvPr id="2" name="Title 1"/>
+          <p:cNvSpPr>
+            <a:spLocks noGrp="1"/>
+          </p:cNvSpPr>
+          <p:nvPr>
+            <p:ph type="title"/>
+          </p:nvPr>
+        </p:nvSpPr>
+        <p:spPr/>
+        <p:txBody>
+          <a:bodyPr/>
+          <a:lstStyle/>
+          <a:p>
+            <a:pPr lvl="0" indent="0" marL="0">
+              <a:buNone/>
+            </a:pPr>
+            <a:r>
+              <a:rPr/>
+              <a:t>climate data resolution</a:t>
+            </a:r>
+          </a:p>
+        </p:txBody>
+      </p:sp>
+      <p:pic>
+        <p:nvPicPr>
+          <p:cNvPr descr="microrefugia_review_files/figure-pptx/unnamed-chunk-27-1.png" id="0" name="Picture 1"/>
+          <p:cNvPicPr>
+            <a:picLocks noGrp="1" noChangeAspect="1"/>
+          </p:cNvPicPr>
+          <p:nvPr/>
+        </p:nvPicPr>
+        <p:blipFill>
+          <a:blip r:embed="rId2"/>
+          <a:stretch>
+            <a:fillRect/>
+          </a:stretch>
+        </p:blipFill>
+        <p:spPr bwMode="auto">
+          <a:xfrm>
+            <a:off x="1181100" y="1193800"/>
+            <a:ext cx="6781800" cy="3390900"/>
+          </a:xfrm>
+          <a:prstGeom prst="rect">
+            <a:avLst/>
+          </a:prstGeom>
+          <a:noFill/>
+          <a:ln w="9525">
+            <a:noFill/>
+            <a:headEnd/>
+            <a:tailEnd/>
+          </a:ln>
+        </p:spPr>
+      </p:pic>
+    </p:spTree>
+  </p:cSld>
+</p:sld>
+</file>
+
+<file path=ppt/slides/slide31.xml><?xml version="1.0" encoding="utf-8"?>
+<p:sld xmlns:a="http://schemas.openxmlformats.org/drawingml/2006/main" xmlns:r="http://schemas.openxmlformats.org/officeDocument/2006/relationships" xmlns:p="http://schemas.openxmlformats.org/presentationml/2006/main">
+  <p:cSld>
+    <p:spTree>
+      <p:nvGrpSpPr>
+        <p:cNvPr id="1" name=""/>
+        <p:cNvGrpSpPr/>
+        <p:nvPr/>
+      </p:nvGrpSpPr>
+      <p:grpSpPr>
+        <a:xfrm>
+          <a:off x="0" y="0"/>
+          <a:ext cx="0" cy="0"/>
+          <a:chOff x="0" y="0"/>
+          <a:chExt cx="0" cy="0"/>
+        </a:xfrm>
+      </p:grpSpPr>
+      <p:sp>
+        <p:nvSpPr>
+          <p:cNvPr id="2" name="Title 1"/>
+          <p:cNvSpPr>
+            <a:spLocks noGrp="1"/>
+          </p:cNvSpPr>
+          <p:nvPr>
+            <p:ph type="title"/>
+          </p:nvPr>
+        </p:nvSpPr>
+        <p:spPr/>
+        <p:txBody>
+          <a:bodyPr/>
+          <a:lstStyle/>
+          <a:p>
+            <a:pPr lvl="0" indent="0" marL="0">
+              <a:buNone/>
+            </a:pPr>
+            <a:r>
+              <a:rPr/>
+              <a:t>Other habitat variables</a:t>
+            </a:r>
+          </a:p>
+        </p:txBody>
+      </p:sp>
+      <p:pic>
+        <p:nvPicPr>
+          <p:cNvPr descr="microrefugia_review_files/figure-pptx/unnamed-chunk-28-1.png" id="0" name="Picture 1"/>
+          <p:cNvPicPr>
+            <a:picLocks noGrp="1" noChangeAspect="1"/>
+          </p:cNvPicPr>
+          <p:nvPr/>
+        </p:nvPicPr>
+        <p:blipFill>
+          <a:blip r:embed="rId2"/>
+          <a:stretch>
+            <a:fillRect/>
+          </a:stretch>
+        </p:blipFill>
+        <p:spPr bwMode="auto">
+          <a:xfrm>
+            <a:off x="1181100" y="1193800"/>
+            <a:ext cx="6781800" cy="3390900"/>
+          </a:xfrm>
+          <a:prstGeom prst="rect">
+            <a:avLst/>
+          </a:prstGeom>
+          <a:noFill/>
+          <a:ln w="9525">
+            <a:noFill/>
+            <a:headEnd/>
+            <a:tailEnd/>
+          </a:ln>
+        </p:spPr>
+      </p:pic>
+    </p:spTree>
+  </p:cSld>
+</p:sld>
+</file>
+
+<file path=ppt/slides/slide32.xml><?xml version="1.0" encoding="utf-8"?>
+<p:sld xmlns:a="http://schemas.openxmlformats.org/drawingml/2006/main" xmlns:r="http://schemas.openxmlformats.org/officeDocument/2006/relationships" xmlns:p="http://schemas.openxmlformats.org/presentationml/2006/main">
+  <p:cSld>
+    <p:spTree>
+      <p:nvGrpSpPr>
+        <p:cNvPr id="1" name=""/>
+        <p:cNvGrpSpPr/>
+        <p:nvPr/>
+      </p:nvGrpSpPr>
+      <p:grpSpPr>
+        <a:xfrm>
+          <a:off x="0" y="0"/>
+          <a:ext cx="0" cy="0"/>
+          <a:chOff x="0" y="0"/>
+          <a:chExt cx="0" cy="0"/>
+        </a:xfrm>
+      </p:grpSpPr>
+      <p:sp>
+        <p:nvSpPr>
+          <p:cNvPr id="2" name="Title 1"/>
+          <p:cNvSpPr>
+            <a:spLocks noGrp="1"/>
+          </p:cNvSpPr>
+          <p:nvPr>
+            <p:ph type="title"/>
+          </p:nvPr>
+        </p:nvSpPr>
+        <p:spPr/>
+        <p:txBody>
+          <a:bodyPr/>
+          <a:lstStyle/>
+          <a:p>
+            <a:pPr lvl="0" indent="0" marL="0">
+              <a:buNone/>
+            </a:pPr>
+            <a:r>
+              <a:rPr/>
+              <a:t>specific quantification</a:t>
+            </a:r>
+          </a:p>
+        </p:txBody>
+      </p:sp>
+      <p:pic>
+        <p:nvPicPr>
+          <p:cNvPr descr="microrefugia_review_files/figure-pptx/unnamed-chunk-29-1.png" id="0" name="Picture 1"/>
+          <p:cNvPicPr>
+            <a:picLocks noGrp="1" noChangeAspect="1"/>
+          </p:cNvPicPr>
+          <p:nvPr/>
+        </p:nvPicPr>
+        <p:blipFill>
+          <a:blip r:embed="rId2"/>
+          <a:stretch>
+            <a:fillRect/>
+          </a:stretch>
+        </p:blipFill>
+        <p:spPr bwMode="auto">
+          <a:xfrm>
+            <a:off x="1181100" y="1193800"/>
+            <a:ext cx="6781800" cy="3390900"/>
+          </a:xfrm>
+          <a:prstGeom prst="rect">
+            <a:avLst/>
+          </a:prstGeom>
+          <a:noFill/>
+          <a:ln w="9525">
+            <a:noFill/>
+            <a:headEnd/>
+            <a:tailEnd/>
+          </a:ln>
+        </p:spPr>
+      </p:pic>
+    </p:spTree>
+  </p:cSld>
+</p:sld>
+</file>
+
+<file path=ppt/slides/slide33.xml><?xml version="1.0" encoding="utf-8"?>
+<p:sld xmlns:a="http://schemas.openxmlformats.org/drawingml/2006/main" xmlns:r="http://schemas.openxmlformats.org/officeDocument/2006/relationships" xmlns:p="http://schemas.openxmlformats.org/presentationml/2006/main">
+  <p:cSld>
+    <p:spTree>
+      <p:nvGrpSpPr>
+        <p:cNvPr id="1" name=""/>
+        <p:cNvGrpSpPr/>
+        <p:nvPr/>
+      </p:nvGrpSpPr>
+      <p:grpSpPr>
+        <a:xfrm>
+          <a:off x="0" y="0"/>
+          <a:ext cx="0" cy="0"/>
+          <a:chOff x="0" y="0"/>
+          <a:chExt cx="0" cy="0"/>
+        </a:xfrm>
+      </p:grpSpPr>
+      <p:sp>
+        <p:nvSpPr>
+          <p:cNvPr id="3" name="Content Placeholder 2"/>
+          <p:cNvSpPr>
+            <a:spLocks noGrp="1"/>
+          </p:cNvSpPr>
+          <p:nvPr>
+            <p:ph idx="1"/>
+          </p:nvPr>
+        </p:nvSpPr>
+        <p:spPr/>
+        <p:txBody>
+          <a:bodyPr/>
+          <a:lstStyle/>
+          <a:p>
+            <a:pPr lvl="0" indent="0">
+              <a:buNone/>
+            </a:pPr>
+            <a:r>
+              <a:rPr>
+                <a:latin typeface="Courier"/>
+              </a:rPr>
+              <a:t>[1] "119 descriptions entered"</a:t>
+            </a:r>
+          </a:p>
+        </p:txBody>
+      </p:sp>
+    </p:spTree>
+  </p:cSld>
+</p:sld>
+</file>
+
 <file path=ppt/slides/slide4.xml><?xml version="1.0" encoding="utf-8"?>
 <p:sld xmlns:a="http://schemas.openxmlformats.org/drawingml/2006/main" xmlns:r="http://schemas.openxmlformats.org/officeDocument/2006/relationships" xmlns:p="http://schemas.openxmlformats.org/presentationml/2006/main">
   <p:cSld>
@@ -4839,14 +5364,14 @@
             </a:pPr>
             <a:r>
               <a:rPr/>
-              <a:t>included by year</a:t>
+              <a:t>reasons for exclusion</a:t>
             </a:r>
           </a:p>
         </p:txBody>
       </p:sp>
       <p:pic>
         <p:nvPicPr>
-          <p:cNvPr descr="microrefugia_review_files/figure-pptx/unnamed-chunk-4-1.png" id="0" name="Picture 1"/>
+          <p:cNvPr descr="microrefugia_review_files/figure-pptx/unnamed-chunk-3-1.png" id="0" name="Picture 1"/>
           <p:cNvPicPr>
             <a:picLocks noGrp="1" noChangeAspect="1"/>
           </p:cNvPicPr>
@@ -4906,12 +5431,7 @@
             <p:ph type="title"/>
           </p:nvPr>
         </p:nvSpPr>
-        <p:spPr>
-          <a:xfrm>
-            <a:off x="457201" y="204787"/>
-            <a:ext cx="3008313" cy="871538"/>
-          </a:xfrm>
-        </p:spPr>
+        <p:spPr/>
         <p:txBody>
           <a:bodyPr/>
           <a:lstStyle/>
@@ -4921,41 +5441,14 @@
             </a:pPr>
             <a:r>
               <a:rPr/>
-              <a:t>Many locations, mostly defined</a:t>
-            </a:r>
-          </a:p>
-        </p:txBody>
-      </p:sp>
-      <p:sp>
-        <p:nvSpPr>
-          <p:cNvPr id="4" name="Text Placeholder 3"/>
-          <p:cNvSpPr>
-            <a:spLocks noGrp="1"/>
-          </p:cNvSpPr>
-          <p:nvPr>
-            <p:ph idx="2" sz="half" type="body"/>
-          </p:nvPr>
-        </p:nvSpPr>
-        <p:spPr/>
-        <p:txBody>
-          <a:bodyPr/>
-          <a:lstStyle/>
-          <a:p>
-            <a:pPr lvl="0" indent="0">
-              <a:buNone/>
-            </a:pPr>
-            <a:r>
-              <a:rPr>
-                <a:latin typeface="Courier"/>
-              </a:rPr>
-              <a:t>[1] "242 locations"</a:t>
+              <a:t>included by year</a:t>
             </a:r>
           </a:p>
         </p:txBody>
       </p:sp>
       <p:pic>
         <p:nvPicPr>
-          <p:cNvPr descr="microrefugia_review_files/figure-pptx/unnamed-chunk-5-1.png" id="0" name="Picture 1"/>
+          <p:cNvPr descr="microrefugia_review_files/figure-pptx/unnamed-chunk-4-1.png" id="0" name="Picture 1"/>
           <p:cNvPicPr>
             <a:picLocks noGrp="1" noChangeAspect="1"/>
           </p:cNvPicPr>
@@ -4969,8 +5462,8 @@
         </p:blipFill>
         <p:spPr bwMode="auto">
           <a:xfrm>
-            <a:off x="3568700" y="1117600"/>
-            <a:ext cx="5105400" cy="2552700"/>
+            <a:off x="1181100" y="1193800"/>
+            <a:ext cx="6781800" cy="3390900"/>
           </a:xfrm>
           <a:prstGeom prst="rect">
             <a:avLst/>
@@ -5025,41 +5518,47 @@
             </a:pPr>
             <a:r>
               <a:rPr/>
-              <a:t>habitats</a:t>
-            </a:r>
-          </a:p>
-        </p:txBody>
-      </p:sp>
-      <p:pic>
-        <p:nvPicPr>
-          <p:cNvPr descr="microrefugia_review_files/figure-pptx/unnamed-chunk-6-1.png" id="0" name="Picture 1"/>
-          <p:cNvPicPr>
-            <a:picLocks noGrp="1" noChangeAspect="1"/>
-          </p:cNvPicPr>
-          <p:nvPr/>
-        </p:nvPicPr>
-        <p:blipFill>
-          <a:blip r:embed="rId2"/>
-          <a:stretch>
-            <a:fillRect/>
-          </a:stretch>
-        </p:blipFill>
-        <p:spPr bwMode="auto">
-          <a:xfrm>
-            <a:off x="1181100" y="1193800"/>
-            <a:ext cx="6781800" cy="3390900"/>
-          </a:xfrm>
-          <a:prstGeom prst="rect">
-            <a:avLst/>
-          </a:prstGeom>
-          <a:noFill/>
-          <a:ln w="9525">
-            <a:noFill/>
-            <a:headEnd/>
-            <a:tailEnd/>
-          </a:ln>
-        </p:spPr>
-      </p:pic>
+              <a:t>locations</a:t>
+            </a:r>
+          </a:p>
+        </p:txBody>
+      </p:sp>
+      <p:sp>
+        <p:nvSpPr>
+          <p:cNvPr id="3" name="Content Placeholder 2"/>
+          <p:cNvSpPr>
+            <a:spLocks noGrp="1"/>
+          </p:cNvSpPr>
+          <p:nvPr>
+            <p:ph idx="1"/>
+          </p:nvPr>
+        </p:nvSpPr>
+        <p:spPr/>
+        <p:txBody>
+          <a:bodyPr/>
+          <a:lstStyle/>
+          <a:p>
+            <a:pPr lvl="0" indent="0" marL="0">
+              <a:buNone/>
+            </a:pPr>
+            <a:r>
+              <a:rPr/>
+              <a:t>Could be a map figure for the paper if we get coordinates</a:t>
+            </a:r>
+          </a:p>
+          <a:p>
+            <a:pPr lvl="0" indent="0">
+              <a:buNone/>
+            </a:pPr>
+            <a:r>
+              <a:rPr>
+                <a:latin typeface="Courier"/>
+              </a:rPr>
+              <a:t>[1] "242 locations"</a:t>
+            </a:r>
+          </a:p>
+        </p:txBody>
+      </p:sp>
     </p:spTree>
   </p:cSld>
 </p:sld>
@@ -5102,14 +5601,14 @@
             </a:pPr>
             <a:r>
               <a:rPr/>
-              <a:t>species groups</a:t>
+              <a:t>Refugia mostly defined</a:t>
             </a:r>
           </a:p>
         </p:txBody>
       </p:sp>
       <p:pic>
         <p:nvPicPr>
-          <p:cNvPr descr="microrefugia_review_files/figure-pptx/unnamed-chunk-7-1.png" id="0" name="Picture 1"/>
+          <p:cNvPr descr="microrefugia_review_files/figure-pptx/unnamed-chunk-6-1.png" id="0" name="Picture 1"/>
           <p:cNvPicPr>
             <a:picLocks noGrp="1" noChangeAspect="1"/>
           </p:cNvPicPr>
@@ -5179,14 +5678,14 @@
             </a:pPr>
             <a:r>
               <a:rPr/>
-              <a:t>framework</a:t>
+              <a:t>habitats</a:t>
             </a:r>
           </a:p>
         </p:txBody>
       </p:sp>
       <p:pic>
         <p:nvPicPr>
-          <p:cNvPr descr="microrefugia_review_files/figure-pptx/unnamed-chunk-8-1.png" id="0" name="Picture 1"/>
+          <p:cNvPr descr="microrefugia_review_files/figure-pptx/unnamed-chunk-7-1.png" id="0" name="Picture 1"/>
           <p:cNvPicPr>
             <a:picLocks noGrp="1" noChangeAspect="1"/>
           </p:cNvPicPr>
@@ -5256,14 +5755,14 @@
             </a:pPr>
             <a:r>
               <a:rPr/>
-              <a:t>refugia term</a:t>
+              <a:t>species groups</a:t>
             </a:r>
           </a:p>
         </p:txBody>
       </p:sp>
       <p:pic>
         <p:nvPicPr>
-          <p:cNvPr descr="microrefugia_review_files/figure-pptx/unnamed-chunk-9-1.png" id="0" name="Picture 1"/>
+          <p:cNvPr descr="microrefugia_review_files/figure-pptx/unnamed-chunk-8-1.png" id="0" name="Picture 1"/>
           <p:cNvPicPr>
             <a:picLocks noGrp="1" noChangeAspect="1"/>
           </p:cNvPicPr>
